--- a/examples/pm1_simple_ppt_merge/simple_ppt_merge_merged.pptx
+++ b/examples/pm1_simple_ppt_merge/simple_ppt_merge_merged.pptx
@@ -762,7 +762,7 @@
     </p:spTree>
     <p:extLst>
       <p:ext uri="{BB962C8B-B14F-4D97-AF65-F5344CB8AC3E}">
-        <p14:creationId xmlns:p14="http://schemas.microsoft.com/office/powerpoint/2010/main" val="3295831855"/>
+        <p14:creationId xmlns:p14="http://schemas.microsoft.com/office/powerpoint/2010/main" val="3559134626"/>
       </p:ext>
     </p:extLst>
   </p:cSld>
@@ -1021,7 +1021,7 @@
     </p:spTree>
     <p:extLst>
       <p:ext uri="{BB962C8B-B14F-4D97-AF65-F5344CB8AC3E}">
-        <p14:creationId xmlns:p14="http://schemas.microsoft.com/office/powerpoint/2010/main" val="2339253067"/>
+        <p14:creationId xmlns:p14="http://schemas.microsoft.com/office/powerpoint/2010/main" val="1028807567"/>
       </p:ext>
     </p:extLst>
   </p:cSld>
@@ -1235,7 +1235,7 @@
     </p:spTree>
     <p:extLst>
       <p:ext uri="{BB962C8B-B14F-4D97-AF65-F5344CB8AC3E}">
-        <p14:creationId xmlns:p14="http://schemas.microsoft.com/office/powerpoint/2010/main" val="744526632"/>
+        <p14:creationId xmlns:p14="http://schemas.microsoft.com/office/powerpoint/2010/main" val="858369707"/>
       </p:ext>
     </p:extLst>
   </p:cSld>
@@ -1454,7 +1454,7 @@
     </p:spTree>
     <p:extLst>
       <p:ext uri="{BB962C8B-B14F-4D97-AF65-F5344CB8AC3E}">
-        <p14:creationId xmlns:p14="http://schemas.microsoft.com/office/powerpoint/2010/main" val="651703267"/>
+        <p14:creationId xmlns:p14="http://schemas.microsoft.com/office/powerpoint/2010/main" val="3570289692"/>
       </p:ext>
     </p:extLst>
   </p:cSld>
@@ -1562,7 +1562,7 @@
     </p:spTree>
     <p:extLst>
       <p:ext uri="{BB962C8B-B14F-4D97-AF65-F5344CB8AC3E}">
-        <p14:creationId xmlns:p14="http://schemas.microsoft.com/office/powerpoint/2010/main" val="1151986877"/>
+        <p14:creationId xmlns:p14="http://schemas.microsoft.com/office/powerpoint/2010/main" val="3460448285"/>
       </p:ext>
     </p:extLst>
   </p:cSld>
@@ -1670,7 +1670,7 @@
     </p:spTree>
     <p:extLst>
       <p:ext uri="{BB962C8B-B14F-4D97-AF65-F5344CB8AC3E}">
-        <p14:creationId xmlns:p14="http://schemas.microsoft.com/office/powerpoint/2010/main" val="854405521"/>
+        <p14:creationId xmlns:p14="http://schemas.microsoft.com/office/powerpoint/2010/main" val="2477172149"/>
       </p:ext>
     </p:extLst>
   </p:cSld>
@@ -5799,7 +5799,7 @@
     </p:spTree>
     <p:extLst>
       <p:ext uri="{BB962C8B-B14F-4D97-AF65-F5344CB8AC3E}">
-        <p14:creationId xmlns:p14="http://schemas.microsoft.com/office/powerpoint/2010/main" val="833343904"/>
+        <p14:creationId xmlns:p14="http://schemas.microsoft.com/office/powerpoint/2010/main" val="1247764327"/>
       </p:ext>
     </p:extLst>
   </p:cSld>
@@ -6576,7 +6576,7 @@
     </p:spTree>
     <p:extLst>
       <p:ext uri="{BB962C8B-B14F-4D97-AF65-F5344CB8AC3E}">
-        <p14:creationId xmlns:p14="http://schemas.microsoft.com/office/powerpoint/2010/main" val="4089068484"/>
+        <p14:creationId xmlns:p14="http://schemas.microsoft.com/office/powerpoint/2010/main" val="1565953057"/>
       </p:ext>
     </p:extLst>
   </p:cSld>
@@ -7168,7 +7168,7 @@
     </p:spTree>
     <p:extLst>
       <p:ext uri="{BB962C8B-B14F-4D97-AF65-F5344CB8AC3E}">
-        <p14:creationId xmlns:p14="http://schemas.microsoft.com/office/powerpoint/2010/main" val="2618035657"/>
+        <p14:creationId xmlns:p14="http://schemas.microsoft.com/office/powerpoint/2010/main" val="1606965999"/>
       </p:ext>
     </p:extLst>
   </p:cSld>
@@ -8404,7 +8404,7 @@
     </p:spTree>
     <p:extLst>
       <p:ext uri="{BB962C8B-B14F-4D97-AF65-F5344CB8AC3E}">
-        <p14:creationId xmlns:p14="http://schemas.microsoft.com/office/powerpoint/2010/main" val="1235723119"/>
+        <p14:creationId xmlns:p14="http://schemas.microsoft.com/office/powerpoint/2010/main" val="2713086558"/>
       </p:ext>
     </p:extLst>
   </p:cSld>
@@ -8767,7 +8767,7 @@
     </p:spTree>
     <p:extLst>
       <p:ext uri="{BB962C8B-B14F-4D97-AF65-F5344CB8AC3E}">
-        <p14:creationId xmlns:p14="http://schemas.microsoft.com/office/powerpoint/2010/main" val="1709916476"/>
+        <p14:creationId xmlns:p14="http://schemas.microsoft.com/office/powerpoint/2010/main" val="2648413728"/>
       </p:ext>
     </p:extLst>
   </p:cSld>
@@ -9130,7 +9130,7 @@
     </p:spTree>
     <p:extLst>
       <p:ext uri="{BB962C8B-B14F-4D97-AF65-F5344CB8AC3E}">
-        <p14:creationId xmlns:p14="http://schemas.microsoft.com/office/powerpoint/2010/main" val="713193514"/>
+        <p14:creationId xmlns:p14="http://schemas.microsoft.com/office/powerpoint/2010/main" val="392298839"/>
       </p:ext>
     </p:extLst>
   </p:cSld>

--- a/examples/pm1_simple_ppt_merge/simple_ppt_merge_merged.pptx
+++ b/examples/pm1_simple_ppt_merge/simple_ppt_merge_merged.pptx
@@ -762,7 +762,7 @@
     </p:spTree>
     <p:extLst>
       <p:ext uri="{BB962C8B-B14F-4D97-AF65-F5344CB8AC3E}">
-        <p14:creationId xmlns:p14="http://schemas.microsoft.com/office/powerpoint/2010/main" val="3559134626"/>
+        <p14:creationId xmlns:p14="http://schemas.microsoft.com/office/powerpoint/2010/main" val="1596317455"/>
       </p:ext>
     </p:extLst>
   </p:cSld>
@@ -1021,7 +1021,7 @@
     </p:spTree>
     <p:extLst>
       <p:ext uri="{BB962C8B-B14F-4D97-AF65-F5344CB8AC3E}">
-        <p14:creationId xmlns:p14="http://schemas.microsoft.com/office/powerpoint/2010/main" val="1028807567"/>
+        <p14:creationId xmlns:p14="http://schemas.microsoft.com/office/powerpoint/2010/main" val="2701105010"/>
       </p:ext>
     </p:extLst>
   </p:cSld>
@@ -1235,7 +1235,7 @@
     </p:spTree>
     <p:extLst>
       <p:ext uri="{BB962C8B-B14F-4D97-AF65-F5344CB8AC3E}">
-        <p14:creationId xmlns:p14="http://schemas.microsoft.com/office/powerpoint/2010/main" val="858369707"/>
+        <p14:creationId xmlns:p14="http://schemas.microsoft.com/office/powerpoint/2010/main" val="2324379364"/>
       </p:ext>
     </p:extLst>
   </p:cSld>
@@ -1454,7 +1454,7 @@
     </p:spTree>
     <p:extLst>
       <p:ext uri="{BB962C8B-B14F-4D97-AF65-F5344CB8AC3E}">
-        <p14:creationId xmlns:p14="http://schemas.microsoft.com/office/powerpoint/2010/main" val="3570289692"/>
+        <p14:creationId xmlns:p14="http://schemas.microsoft.com/office/powerpoint/2010/main" val="2969319691"/>
       </p:ext>
     </p:extLst>
   </p:cSld>
@@ -1562,7 +1562,7 @@
     </p:spTree>
     <p:extLst>
       <p:ext uri="{BB962C8B-B14F-4D97-AF65-F5344CB8AC3E}">
-        <p14:creationId xmlns:p14="http://schemas.microsoft.com/office/powerpoint/2010/main" val="3460448285"/>
+        <p14:creationId xmlns:p14="http://schemas.microsoft.com/office/powerpoint/2010/main" val="2142732517"/>
       </p:ext>
     </p:extLst>
   </p:cSld>
@@ -1670,7 +1670,7 @@
     </p:spTree>
     <p:extLst>
       <p:ext uri="{BB962C8B-B14F-4D97-AF65-F5344CB8AC3E}">
-        <p14:creationId xmlns:p14="http://schemas.microsoft.com/office/powerpoint/2010/main" val="2477172149"/>
+        <p14:creationId xmlns:p14="http://schemas.microsoft.com/office/powerpoint/2010/main" val="2706187290"/>
       </p:ext>
     </p:extLst>
   </p:cSld>
@@ -5799,7 +5799,7 @@
     </p:spTree>
     <p:extLst>
       <p:ext uri="{BB962C8B-B14F-4D97-AF65-F5344CB8AC3E}">
-        <p14:creationId xmlns:p14="http://schemas.microsoft.com/office/powerpoint/2010/main" val="1247764327"/>
+        <p14:creationId xmlns:p14="http://schemas.microsoft.com/office/powerpoint/2010/main" val="1583749730"/>
       </p:ext>
     </p:extLst>
   </p:cSld>
@@ -6576,7 +6576,7 @@
     </p:spTree>
     <p:extLst>
       <p:ext uri="{BB962C8B-B14F-4D97-AF65-F5344CB8AC3E}">
-        <p14:creationId xmlns:p14="http://schemas.microsoft.com/office/powerpoint/2010/main" val="1565953057"/>
+        <p14:creationId xmlns:p14="http://schemas.microsoft.com/office/powerpoint/2010/main" val="2002685158"/>
       </p:ext>
     </p:extLst>
   </p:cSld>
@@ -7168,7 +7168,7 @@
     </p:spTree>
     <p:extLst>
       <p:ext uri="{BB962C8B-B14F-4D97-AF65-F5344CB8AC3E}">
-        <p14:creationId xmlns:p14="http://schemas.microsoft.com/office/powerpoint/2010/main" val="1606965999"/>
+        <p14:creationId xmlns:p14="http://schemas.microsoft.com/office/powerpoint/2010/main" val="476897537"/>
       </p:ext>
     </p:extLst>
   </p:cSld>
@@ -8404,7 +8404,7 @@
     </p:spTree>
     <p:extLst>
       <p:ext uri="{BB962C8B-B14F-4D97-AF65-F5344CB8AC3E}">
-        <p14:creationId xmlns:p14="http://schemas.microsoft.com/office/powerpoint/2010/main" val="2713086558"/>
+        <p14:creationId xmlns:p14="http://schemas.microsoft.com/office/powerpoint/2010/main" val="2303315791"/>
       </p:ext>
     </p:extLst>
   </p:cSld>
@@ -8767,7 +8767,7 @@
     </p:spTree>
     <p:extLst>
       <p:ext uri="{BB962C8B-B14F-4D97-AF65-F5344CB8AC3E}">
-        <p14:creationId xmlns:p14="http://schemas.microsoft.com/office/powerpoint/2010/main" val="2648413728"/>
+        <p14:creationId xmlns:p14="http://schemas.microsoft.com/office/powerpoint/2010/main" val="2480569481"/>
       </p:ext>
     </p:extLst>
   </p:cSld>
@@ -9130,7 +9130,7 @@
     </p:spTree>
     <p:extLst>
       <p:ext uri="{BB962C8B-B14F-4D97-AF65-F5344CB8AC3E}">
-        <p14:creationId xmlns:p14="http://schemas.microsoft.com/office/powerpoint/2010/main" val="392298839"/>
+        <p14:creationId xmlns:p14="http://schemas.microsoft.com/office/powerpoint/2010/main" val="3714667168"/>
       </p:ext>
     </p:extLst>
   </p:cSld>

--- a/examples/pm1_simple_ppt_merge/simple_ppt_merge_merged.pptx
+++ b/examples/pm1_simple_ppt_merge/simple_ppt_merge_merged.pptx
@@ -243,7 +243,7 @@
           <a:p>
             <a:fld id="{294670BC-B8C6-44A7-84E1-23632D8FD86F}" type="datetimeFigureOut">
               <a:rPr kumimoji="1" lang="ja-JP" altLang="en-US" smtClean="0"/>
-              <a:t>2026/6/4</a:t>
+              <a:t>2026/6/6</a:t>
             </a:fld>
             <a:endParaRPr kumimoji="1" lang="ja-JP" altLang="en-US"/>
           </a:p>
@@ -762,7 +762,7 @@
     </p:spTree>
     <p:extLst>
       <p:ext uri="{BB962C8B-B14F-4D97-AF65-F5344CB8AC3E}">
-        <p14:creationId xmlns:p14="http://schemas.microsoft.com/office/powerpoint/2010/main" val="1596317455"/>
+        <p14:creationId xmlns:p14="http://schemas.microsoft.com/office/powerpoint/2010/main" val="2783121584"/>
       </p:ext>
     </p:extLst>
   </p:cSld>
@@ -1021,7 +1021,7 @@
     </p:spTree>
     <p:extLst>
       <p:ext uri="{BB962C8B-B14F-4D97-AF65-F5344CB8AC3E}">
-        <p14:creationId xmlns:p14="http://schemas.microsoft.com/office/powerpoint/2010/main" val="2701105010"/>
+        <p14:creationId xmlns:p14="http://schemas.microsoft.com/office/powerpoint/2010/main" val="1149745524"/>
       </p:ext>
     </p:extLst>
   </p:cSld>
@@ -1235,7 +1235,7 @@
     </p:spTree>
     <p:extLst>
       <p:ext uri="{BB962C8B-B14F-4D97-AF65-F5344CB8AC3E}">
-        <p14:creationId xmlns:p14="http://schemas.microsoft.com/office/powerpoint/2010/main" val="2324379364"/>
+        <p14:creationId xmlns:p14="http://schemas.microsoft.com/office/powerpoint/2010/main" val="498314158"/>
       </p:ext>
     </p:extLst>
   </p:cSld>
@@ -1454,7 +1454,7 @@
     </p:spTree>
     <p:extLst>
       <p:ext uri="{BB962C8B-B14F-4D97-AF65-F5344CB8AC3E}">
-        <p14:creationId xmlns:p14="http://schemas.microsoft.com/office/powerpoint/2010/main" val="2969319691"/>
+        <p14:creationId xmlns:p14="http://schemas.microsoft.com/office/powerpoint/2010/main" val="3742120746"/>
       </p:ext>
     </p:extLst>
   </p:cSld>
@@ -1562,7 +1562,7 @@
     </p:spTree>
     <p:extLst>
       <p:ext uri="{BB962C8B-B14F-4D97-AF65-F5344CB8AC3E}">
-        <p14:creationId xmlns:p14="http://schemas.microsoft.com/office/powerpoint/2010/main" val="2142732517"/>
+        <p14:creationId xmlns:p14="http://schemas.microsoft.com/office/powerpoint/2010/main" val="3307061398"/>
       </p:ext>
     </p:extLst>
   </p:cSld>
@@ -1670,7 +1670,7 @@
     </p:spTree>
     <p:extLst>
       <p:ext uri="{BB962C8B-B14F-4D97-AF65-F5344CB8AC3E}">
-        <p14:creationId xmlns:p14="http://schemas.microsoft.com/office/powerpoint/2010/main" val="2706187290"/>
+        <p14:creationId xmlns:p14="http://schemas.microsoft.com/office/powerpoint/2010/main" val="1452594689"/>
       </p:ext>
     </p:extLst>
   </p:cSld>
@@ -5799,7 +5799,7 @@
     </p:spTree>
     <p:extLst>
       <p:ext uri="{BB962C8B-B14F-4D97-AF65-F5344CB8AC3E}">
-        <p14:creationId xmlns:p14="http://schemas.microsoft.com/office/powerpoint/2010/main" val="1583749730"/>
+        <p14:creationId xmlns:p14="http://schemas.microsoft.com/office/powerpoint/2010/main" val="2969927807"/>
       </p:ext>
     </p:extLst>
   </p:cSld>
@@ -6576,7 +6576,7 @@
     </p:spTree>
     <p:extLst>
       <p:ext uri="{BB962C8B-B14F-4D97-AF65-F5344CB8AC3E}">
-        <p14:creationId xmlns:p14="http://schemas.microsoft.com/office/powerpoint/2010/main" val="2002685158"/>
+        <p14:creationId xmlns:p14="http://schemas.microsoft.com/office/powerpoint/2010/main" val="2143014170"/>
       </p:ext>
     </p:extLst>
   </p:cSld>
@@ -7168,7 +7168,7 @@
     </p:spTree>
     <p:extLst>
       <p:ext uri="{BB962C8B-B14F-4D97-AF65-F5344CB8AC3E}">
-        <p14:creationId xmlns:p14="http://schemas.microsoft.com/office/powerpoint/2010/main" val="476897537"/>
+        <p14:creationId xmlns:p14="http://schemas.microsoft.com/office/powerpoint/2010/main" val="2712449742"/>
       </p:ext>
     </p:extLst>
   </p:cSld>
@@ -8404,7 +8404,7 @@
     </p:spTree>
     <p:extLst>
       <p:ext uri="{BB962C8B-B14F-4D97-AF65-F5344CB8AC3E}">
-        <p14:creationId xmlns:p14="http://schemas.microsoft.com/office/powerpoint/2010/main" val="2303315791"/>
+        <p14:creationId xmlns:p14="http://schemas.microsoft.com/office/powerpoint/2010/main" val="773384947"/>
       </p:ext>
     </p:extLst>
   </p:cSld>
@@ -8767,7 +8767,7 @@
     </p:spTree>
     <p:extLst>
       <p:ext uri="{BB962C8B-B14F-4D97-AF65-F5344CB8AC3E}">
-        <p14:creationId xmlns:p14="http://schemas.microsoft.com/office/powerpoint/2010/main" val="2480569481"/>
+        <p14:creationId xmlns:p14="http://schemas.microsoft.com/office/powerpoint/2010/main" val="656165824"/>
       </p:ext>
     </p:extLst>
   </p:cSld>
@@ -9130,7 +9130,7 @@
     </p:spTree>
     <p:extLst>
       <p:ext uri="{BB962C8B-B14F-4D97-AF65-F5344CB8AC3E}">
-        <p14:creationId xmlns:p14="http://schemas.microsoft.com/office/powerpoint/2010/main" val="3714667168"/>
+        <p14:creationId xmlns:p14="http://schemas.microsoft.com/office/powerpoint/2010/main" val="2064284844"/>
       </p:ext>
     </p:extLst>
   </p:cSld>

--- a/examples/pm1_simple_ppt_merge/simple_ppt_merge_merged.pptx
+++ b/examples/pm1_simple_ppt_merge/simple_ppt_merge_merged.pptx
@@ -243,7 +243,7 @@
           <a:p>
             <a:fld id="{294670BC-B8C6-44A7-84E1-23632D8FD86F}" type="datetimeFigureOut">
               <a:rPr kumimoji="1" lang="ja-JP" altLang="en-US" smtClean="0"/>
-              <a:t>2026/6/6</a:t>
+              <a:t>2026/6/8</a:t>
             </a:fld>
             <a:endParaRPr kumimoji="1" lang="ja-JP" altLang="en-US"/>
           </a:p>
@@ -762,7 +762,7 @@
     </p:spTree>
     <p:extLst>
       <p:ext uri="{BB962C8B-B14F-4D97-AF65-F5344CB8AC3E}">
-        <p14:creationId xmlns:p14="http://schemas.microsoft.com/office/powerpoint/2010/main" val="2783121584"/>
+        <p14:creationId xmlns:p14="http://schemas.microsoft.com/office/powerpoint/2010/main" val="3576778247"/>
       </p:ext>
     </p:extLst>
   </p:cSld>
@@ -1021,7 +1021,7 @@
     </p:spTree>
     <p:extLst>
       <p:ext uri="{BB962C8B-B14F-4D97-AF65-F5344CB8AC3E}">
-        <p14:creationId xmlns:p14="http://schemas.microsoft.com/office/powerpoint/2010/main" val="1149745524"/>
+        <p14:creationId xmlns:p14="http://schemas.microsoft.com/office/powerpoint/2010/main" val="2729553400"/>
       </p:ext>
     </p:extLst>
   </p:cSld>
@@ -1235,7 +1235,7 @@
     </p:spTree>
     <p:extLst>
       <p:ext uri="{BB962C8B-B14F-4D97-AF65-F5344CB8AC3E}">
-        <p14:creationId xmlns:p14="http://schemas.microsoft.com/office/powerpoint/2010/main" val="498314158"/>
+        <p14:creationId xmlns:p14="http://schemas.microsoft.com/office/powerpoint/2010/main" val="68133879"/>
       </p:ext>
     </p:extLst>
   </p:cSld>
@@ -1454,7 +1454,7 @@
     </p:spTree>
     <p:extLst>
       <p:ext uri="{BB962C8B-B14F-4D97-AF65-F5344CB8AC3E}">
-        <p14:creationId xmlns:p14="http://schemas.microsoft.com/office/powerpoint/2010/main" val="3742120746"/>
+        <p14:creationId xmlns:p14="http://schemas.microsoft.com/office/powerpoint/2010/main" val="2894687932"/>
       </p:ext>
     </p:extLst>
   </p:cSld>
@@ -1562,7 +1562,7 @@
     </p:spTree>
     <p:extLst>
       <p:ext uri="{BB962C8B-B14F-4D97-AF65-F5344CB8AC3E}">
-        <p14:creationId xmlns:p14="http://schemas.microsoft.com/office/powerpoint/2010/main" val="3307061398"/>
+        <p14:creationId xmlns:p14="http://schemas.microsoft.com/office/powerpoint/2010/main" val="2159088084"/>
       </p:ext>
     </p:extLst>
   </p:cSld>
@@ -1670,7 +1670,7 @@
     </p:spTree>
     <p:extLst>
       <p:ext uri="{BB962C8B-B14F-4D97-AF65-F5344CB8AC3E}">
-        <p14:creationId xmlns:p14="http://schemas.microsoft.com/office/powerpoint/2010/main" val="1452594689"/>
+        <p14:creationId xmlns:p14="http://schemas.microsoft.com/office/powerpoint/2010/main" val="3939306411"/>
       </p:ext>
     </p:extLst>
   </p:cSld>
@@ -5799,7 +5799,7 @@
     </p:spTree>
     <p:extLst>
       <p:ext uri="{BB962C8B-B14F-4D97-AF65-F5344CB8AC3E}">
-        <p14:creationId xmlns:p14="http://schemas.microsoft.com/office/powerpoint/2010/main" val="2969927807"/>
+        <p14:creationId xmlns:p14="http://schemas.microsoft.com/office/powerpoint/2010/main" val="3359853414"/>
       </p:ext>
     </p:extLst>
   </p:cSld>
@@ -6576,7 +6576,7 @@
     </p:spTree>
     <p:extLst>
       <p:ext uri="{BB962C8B-B14F-4D97-AF65-F5344CB8AC3E}">
-        <p14:creationId xmlns:p14="http://schemas.microsoft.com/office/powerpoint/2010/main" val="2143014170"/>
+        <p14:creationId xmlns:p14="http://schemas.microsoft.com/office/powerpoint/2010/main" val="2859661211"/>
       </p:ext>
     </p:extLst>
   </p:cSld>
@@ -7168,7 +7168,7 @@
     </p:spTree>
     <p:extLst>
       <p:ext uri="{BB962C8B-B14F-4D97-AF65-F5344CB8AC3E}">
-        <p14:creationId xmlns:p14="http://schemas.microsoft.com/office/powerpoint/2010/main" val="2712449742"/>
+        <p14:creationId xmlns:p14="http://schemas.microsoft.com/office/powerpoint/2010/main" val="2174783205"/>
       </p:ext>
     </p:extLst>
   </p:cSld>
@@ -8404,7 +8404,7 @@
     </p:spTree>
     <p:extLst>
       <p:ext uri="{BB962C8B-B14F-4D97-AF65-F5344CB8AC3E}">
-        <p14:creationId xmlns:p14="http://schemas.microsoft.com/office/powerpoint/2010/main" val="773384947"/>
+        <p14:creationId xmlns:p14="http://schemas.microsoft.com/office/powerpoint/2010/main" val="2175697899"/>
       </p:ext>
     </p:extLst>
   </p:cSld>
@@ -8767,7 +8767,7 @@
     </p:spTree>
     <p:extLst>
       <p:ext uri="{BB962C8B-B14F-4D97-AF65-F5344CB8AC3E}">
-        <p14:creationId xmlns:p14="http://schemas.microsoft.com/office/powerpoint/2010/main" val="656165824"/>
+        <p14:creationId xmlns:p14="http://schemas.microsoft.com/office/powerpoint/2010/main" val="1345014834"/>
       </p:ext>
     </p:extLst>
   </p:cSld>
@@ -9130,7 +9130,7 @@
     </p:spTree>
     <p:extLst>
       <p:ext uri="{BB962C8B-B14F-4D97-AF65-F5344CB8AC3E}">
-        <p14:creationId xmlns:p14="http://schemas.microsoft.com/office/powerpoint/2010/main" val="2064284844"/>
+        <p14:creationId xmlns:p14="http://schemas.microsoft.com/office/powerpoint/2010/main" val="2510125330"/>
       </p:ext>
     </p:extLst>
   </p:cSld>
